--- a/pitch/ITSG-Spec-Pipeline.pptx
+++ b/pitch/ITSG-Spec-Pipeline.pptx
@@ -506,7 +506,7 @@
           <a:lstStyle/>
           <a:p>
             <a:r>
-              <a:t>We built ITSG Spec Pipeline for the ITSG challenge.</a:t>
+              <a:t>We built §pecs for the ITSG challenge.</a:t>
             </a:r>
           </a:p>
           <a:p>
@@ -731,7 +731,7 @@
           <a:lstStyle/>
           <a:p>
             <a:r>
-              <a:t>ITSG Spec Pipeline: the AI reads and drafts, you approve, tested code calculates.</a:t>
+              <a:t>§pecs: the AI reads and drafts, you approve, tested code calculates.</a:t>
             </a:r>
           </a:p>
           <a:p>
@@ -3894,7 +3894,7 @@
                 </a:solidFill>
                 <a:latin typeface="Arial Narrow"/>
               </a:rPr>
-              <a:t>ITSG Spec Pipeline</a:t>
+              <a:t>§pecs</a:t>
             </a:r>
           </a:p>
         </p:txBody>
@@ -5106,7 +5106,7 @@
                 </a:solidFill>
                 <a:latin typeface="Arial Narrow"/>
               </a:rPr>
-              <a:t>ITSG Spec Pipeline</a:t>
+              <a:t>§pecs</a:t>
             </a:r>
           </a:p>
         </p:txBody>
